--- a/동영상/동아정밀_미팅/동아정밀_PET두께측정기_제안.pptx
+++ b/동영상/동아정밀_미팅/동아정밀_PET두께측정기_제안.pptx
@@ -4791,7 +4791,7 @@
                 </a:solidFill>
                 <a:latin typeface="맑은 고딕"/>
               </a:rPr>
-              <a:t>UTTEC · 홍광선  ihong9059@gmail.com · 010-7186-2452 · 경기 용인시 기흥구 흥덕유타워</a:t>
+              <a:t>UTTEC · 홍광선  ihong9059@gmail.com · 010-2401-9059 · 경기 용인시 기흥구 흥덕유타워</a:t>
             </a:r>
           </a:p>
         </p:txBody>
@@ -6657,7 +6657,7 @@
                 </a:solidFill>
                 <a:latin typeface="맑은 고딕"/>
               </a:rPr>
-              <a:t>UTTEC · 홍광선  ihong9059@gmail.com · 010-7186-2452 · 경기 용인시 기흥구 흥덕유타워</a:t>
+              <a:t>UTTEC · 홍광선  ihong9059@gmail.com · 010-2401-9059 · 경기 용인시 기흥구 흥덕유타워</a:t>
             </a:r>
           </a:p>
         </p:txBody>
@@ -7797,7 +7797,7 @@
                 </a:solidFill>
                 <a:latin typeface="맑은 고딕"/>
               </a:rPr>
-              <a:t>UTTEC · 홍광선  ihong9059@gmail.com · 010-7186-2452 · 경기 용인시 기흥구 흥덕유타워</a:t>
+              <a:t>UTTEC · 홍광선  ihong9059@gmail.com · 010-2401-9059 · 경기 용인시 기흥구 흥덕유타워</a:t>
             </a:r>
           </a:p>
         </p:txBody>
@@ -8595,7 +8595,7 @@
                 </a:solidFill>
                 <a:latin typeface="맑은 고딕"/>
               </a:rPr>
-              <a:t>UTTEC · 홍광선  ihong9059@gmail.com · 010-7186-2452 · 경기 용인시 기흥구 흥덕유타워</a:t>
+              <a:t>UTTEC · 홍광선  ihong9059@gmail.com · 010-2401-9059 · 경기 용인시 기흥구 흥덕유타워</a:t>
             </a:r>
           </a:p>
         </p:txBody>
@@ -10310,7 +10310,7 @@
                 </a:solidFill>
                 <a:latin typeface="맑은 고딕"/>
               </a:rPr>
-              <a:t>UTTEC · 홍광선  ihong9059@gmail.com · 010-7186-2452 · 경기 용인시 기흥구 흥덕유타워</a:t>
+              <a:t>UTTEC · 홍광선  ihong9059@gmail.com · 010-2401-9059 · 경기 용인시 기흥구 흥덕유타워</a:t>
             </a:r>
           </a:p>
         </p:txBody>
@@ -12221,7 +12221,7 @@
                 </a:solidFill>
                 <a:latin typeface="맑은 고딕"/>
               </a:rPr>
-              <a:t>UTTEC · 홍광선  ihong9059@gmail.com · 010-7186-2452 · 경기 용인시 기흥구 흥덕유타워</a:t>
+              <a:t>UTTEC · 홍광선  ihong9059@gmail.com · 010-2401-9059 · 경기 용인시 기흥구 흥덕유타워</a:t>
             </a:r>
           </a:p>
         </p:txBody>
@@ -13366,7 +13366,7 @@
                 </a:solidFill>
                 <a:latin typeface="맑은 고딕"/>
               </a:rPr>
-              <a:t>UTTEC · 홍광선  ihong9059@gmail.com · 010-7186-2452 · 경기 용인시 기흥구 흥덕유타워</a:t>
+              <a:t>UTTEC · 홍광선  ihong9059@gmail.com · 010-2401-9059 · 경기 용인시 기흥구 흥덕유타워</a:t>
             </a:r>
           </a:p>
         </p:txBody>
@@ -14531,7 +14531,7 @@
                 </a:solidFill>
                 <a:latin typeface="맑은 고딕"/>
               </a:rPr>
-              <a:t>UTTEC · 홍광선  ihong9059@gmail.com · 010-7186-2452 · 경기 용인시 기흥구 흥덕유타워</a:t>
+              <a:t>UTTEC · 홍광선  ihong9059@gmail.com · 010-2401-9059 · 경기 용인시 기흥구 흥덕유타워</a:t>
             </a:r>
           </a:p>
         </p:txBody>
@@ -16113,7 +16113,7 @@
                 </a:solidFill>
                 <a:latin typeface="맑은 고딕"/>
               </a:rPr>
-              <a:t>UTTEC · 홍광선  ihong9059@gmail.com · 010-7186-2452 · 경기 용인시 기흥구 흥덕유타워</a:t>
+              <a:t>UTTEC · 홍광선  ihong9059@gmail.com · 010-2401-9059 · 경기 용인시 기흥구 흥덕유타워</a:t>
             </a:r>
           </a:p>
         </p:txBody>
